--- a/Web/Electron-Notes.pptx
+++ b/Web/Electron-Notes.pptx
@@ -9606,39 +9606,44 @@
             <p:ph idx="1"/>
           </p:nvPr>
         </p:nvSpPr>
-        <p:spPr/>
+        <p:spPr>
+          <a:xfrm>
+            <a:off x="838200" y="1211580"/>
+            <a:ext cx="5583555" cy="4549140"/>
+          </a:xfrm>
+        </p:spPr>
         <p:txBody>
           <a:bodyPr/>
           <a:p>
             <a:r>
-              <a:rPr lang="zh-CN" altLang="en-US"/>
+              <a:rPr lang="zh-CN" altLang="en-US" sz="2000"/>
               <a:t>应用白屏</a:t>
             </a:r>
-            <a:endParaRPr lang="zh-CN" altLang="en-US"/>
-          </a:p>
-          <a:p>
-            <a:pPr lvl="1"/>
-            <a:r>
-              <a:rPr lang="en-US" altLang="zh-CN"/>
+            <a:endParaRPr lang="zh-CN" altLang="en-US" sz="2000"/>
+          </a:p>
+          <a:p>
+            <a:pPr lvl="1"/>
+            <a:r>
+              <a:rPr lang="en-US" altLang="zh-CN" sz="1800"/>
               <a:t>references</a:t>
             </a:r>
-            <a:endParaRPr lang="en-US" altLang="zh-CN"/>
+            <a:endParaRPr lang="en-US" altLang="zh-CN" sz="1800"/>
           </a:p>
           <a:p>
             <a:pPr lvl="2"/>
             <a:r>
-              <a:rPr lang="en-US" altLang="zh-CN"/>
+              <a:rPr lang="en-US" altLang="zh-CN" sz="1600"/>
               <a:t>https://juejin.cn/post/7136124646079856671</a:t>
             </a:r>
-            <a:endParaRPr lang="en-US" altLang="zh-CN"/>
+            <a:endParaRPr lang="en-US" altLang="zh-CN" sz="1600"/>
           </a:p>
           <a:p>
             <a:pPr lvl="2"/>
             <a:r>
-              <a:rPr lang="en-US" altLang="zh-CN"/>
+              <a:rPr lang="en-US" altLang="zh-CN" sz="1600"/>
               <a:t>https://www.zhihu.com/question/54091307</a:t>
             </a:r>
-            <a:endParaRPr lang="en-US" altLang="zh-CN"/>
+            <a:endParaRPr lang="en-US" altLang="zh-CN" sz="1665"/>
           </a:p>
         </p:txBody>
       </p:sp>
@@ -9937,131 +9942,155 @@
         <p:spPr>
           <a:xfrm>
             <a:off x="838200" y="1211580"/>
-            <a:ext cx="5181600" cy="5170805"/>
+            <a:ext cx="5440045" cy="5170805"/>
           </a:xfrm>
         </p:spPr>
         <p:txBody>
           <a:bodyPr>
-            <a:normAutofit fontScale="90000" lnSpcReduction="10000"/>
+            <a:noAutofit/>
           </a:bodyPr>
           <a:p>
             <a:r>
-              <a:rPr lang="en-US" altLang="zh-CN"/>
+              <a:rPr lang="en-US" altLang="zh-CN" sz="1400"/>
               <a:t>Steps</a:t>
             </a:r>
-            <a:endParaRPr lang="en-US" altLang="zh-CN"/>
-          </a:p>
-          <a:p>
-            <a:pPr lvl="1"/>
-            <a:r>
-              <a:rPr lang="en-US" altLang="zh-CN"/>
+            <a:endParaRPr lang="en-US" altLang="zh-CN" sz="1400"/>
+          </a:p>
+          <a:p>
+            <a:pPr lvl="1"/>
+            <a:r>
+              <a:rPr lang="en-US" altLang="zh-CN" sz="1400"/>
               <a:t>Install Node.js</a:t>
             </a:r>
-            <a:endParaRPr lang="en-US" altLang="zh-CN"/>
-          </a:p>
-          <a:p>
-            <a:pPr lvl="1"/>
-            <a:r>
-              <a:rPr lang="en-US" altLang="zh-CN"/>
+            <a:endParaRPr lang="en-US" altLang="zh-CN" sz="1400"/>
+          </a:p>
+          <a:p>
+            <a:pPr lvl="1"/>
+            <a:r>
+              <a:rPr lang="en-US" altLang="zh-CN" sz="1400"/>
               <a:t>npm</a:t>
             </a:r>
-            <a:endParaRPr lang="en-US" altLang="zh-CN"/>
+            <a:endParaRPr lang="en-US" altLang="zh-CN" sz="1400"/>
           </a:p>
           <a:p>
             <a:pPr lvl="2"/>
             <a:r>
-              <a:rPr lang="en-US" altLang="zh-CN"/>
+              <a:rPr lang="en-US" altLang="zh-CN" sz="1200"/>
               <a:t>npm install electron@6.0 -D	// electron v6.0 for Node v12</a:t>
             </a:r>
-            <a:endParaRPr lang="en-US" altLang="zh-CN"/>
+            <a:endParaRPr lang="en-US" altLang="zh-CN" sz="1200"/>
           </a:p>
           <a:p>
             <a:pPr lvl="2"/>
             <a:r>
-              <a:rPr lang="en-US" altLang="zh-CN"/>
+              <a:rPr lang="en-US" altLang="zh-CN" sz="1200"/>
               <a:t>npm i -g electron-builder</a:t>
             </a:r>
-            <a:endParaRPr lang="en-US" altLang="zh-CN"/>
+            <a:endParaRPr lang="en-US" altLang="zh-CN" sz="1200"/>
           </a:p>
           <a:p>
             <a:pPr lvl="2"/>
             <a:r>
-              <a:rPr lang="en-US" altLang="zh-CN"/>
+              <a:rPr lang="en-US" altLang="zh-CN" sz="1200"/>
               <a:t>npm i -g windows-build-tools</a:t>
             </a:r>
-            <a:endParaRPr lang="en-US" altLang="zh-CN"/>
-          </a:p>
-          <a:p>
-            <a:pPr lvl="1"/>
-            <a:r>
-              <a:rPr lang="en-US" altLang="zh-CN"/>
+            <a:endParaRPr lang="en-US" altLang="zh-CN" sz="1200"/>
+          </a:p>
+          <a:p>
+            <a:pPr lvl="1"/>
+            <a:r>
+              <a:rPr lang="en-US" altLang="zh-CN" sz="1400"/>
               <a:t>electron .</a:t>
             </a:r>
-            <a:endParaRPr lang="en-US" altLang="zh-CN"/>
-          </a:p>
-          <a:p>
-            <a:pPr lvl="1"/>
-            <a:r>
-              <a:rPr lang="en-US" altLang="zh-CN"/>
+            <a:endParaRPr lang="en-US" altLang="zh-CN" sz="1400"/>
+          </a:p>
+          <a:p>
+            <a:pPr lvl="1"/>
+            <a:r>
+              <a:rPr lang="en-US" altLang="zh-CN" sz="1400"/>
               <a:t>eslint</a:t>
             </a:r>
-            <a:endParaRPr lang="en-US" altLang="zh-CN"/>
+            <a:endParaRPr lang="en-US" altLang="zh-CN" sz="1400"/>
           </a:p>
           <a:p>
             <a:pPr lvl="2"/>
             <a:r>
-              <a:rPr lang="en-US" altLang="zh-CN"/>
+              <a:rPr lang="en-US" altLang="zh-CN" sz="1200"/>
               <a:t>npm i -g eslint eslint-plugin-vue@latest</a:t>
             </a:r>
-            <a:endParaRPr lang="en-US" altLang="zh-CN"/>
-          </a:p>
-          <a:p>
-            <a:pPr lvl="1"/>
-            <a:r>
-              <a:rPr lang="en-US" altLang="zh-CN" sz="2000"/>
+            <a:endParaRPr lang="en-US" altLang="zh-CN" sz="1200"/>
+          </a:p>
+          <a:p>
+            <a:pPr lvl="1"/>
+            <a:r>
+              <a:rPr lang="en-US" altLang="zh-CN" sz="1400"/>
               <a:t>electron-rebuild</a:t>
             </a:r>
-            <a:endParaRPr lang="en-US" altLang="zh-CN" sz="2000"/>
+            <a:endParaRPr lang="en-US" altLang="zh-CN" sz="1400"/>
           </a:p>
           <a:p>
             <a:pPr lvl="2"/>
             <a:r>
-              <a:rPr lang="en-US" altLang="zh-CN"/>
+              <a:rPr lang="en-US" altLang="zh-CN" sz="1200"/>
               <a:t>This executable rebuilds native Node.js modules against the version of Node.js that your Electron project is using.</a:t>
             </a:r>
-            <a:endParaRPr lang="en-US" altLang="zh-CN"/>
+            <a:endParaRPr lang="en-US" altLang="zh-CN" sz="1200"/>
           </a:p>
           <a:p>
             <a:pPr lvl="2"/>
             <a:r>
-              <a:rPr lang="en-US" altLang="zh-CN"/>
+              <a:rPr lang="en-US" altLang="zh-CN" sz="1200"/>
               <a:t>npm i -S electron-rebuild</a:t>
             </a:r>
-            <a:endParaRPr lang="en-US" altLang="zh-CN"/>
+            <a:endParaRPr lang="en-US" altLang="zh-CN" sz="1200"/>
           </a:p>
           <a:p>
             <a:pPr lvl="2"/>
             <a:r>
-              <a:rPr lang="en-US" altLang="zh-CN"/>
+              <a:rPr lang="en-US" altLang="zh-CN" sz="1200"/>
               <a:t>.\node_modules\.bin\electron-rebuild</a:t>
             </a:r>
-            <a:endParaRPr lang="en-US" altLang="zh-CN"/>
+            <a:endParaRPr lang="en-US" altLang="zh-CN" sz="1200"/>
           </a:p>
           <a:p>
             <a:pPr lvl="0"/>
             <a:r>
-              <a:rPr lang="en-US" altLang="zh-CN"/>
+              <a:rPr lang="en-US" altLang="zh-CN" sz="1400"/>
               <a:t>References</a:t>
             </a:r>
-            <a:endParaRPr lang="en-US" altLang="zh-CN"/>
-          </a:p>
-          <a:p>
-            <a:pPr lvl="1"/>
-            <a:r>
-              <a:rPr lang="en-US" altLang="zh-CN"/>
+            <a:endParaRPr lang="en-US" altLang="zh-CN" sz="1400"/>
+          </a:p>
+          <a:p>
+            <a:pPr lvl="1"/>
+            <a:r>
+              <a:rPr lang="en-US" altLang="zh-CN" sz="1400"/>
               <a:t>https://github.com/nodejs/node-gyp#on-windows</a:t>
             </a:r>
-            <a:endParaRPr lang="en-US" altLang="zh-CN"/>
+            <a:endParaRPr lang="en-US" altLang="zh-CN" sz="1400"/>
+          </a:p>
+          <a:p>
+            <a:pPr lvl="0"/>
+            <a:r>
+              <a:rPr lang="en-US" altLang="zh-CN" sz="1400"/>
+              <a:t>Config (.npmrc)</a:t>
+            </a:r>
+            <a:endParaRPr lang="en-US" altLang="zh-CN" sz="1400"/>
+          </a:p>
+          <a:p>
+            <a:pPr lvl="1"/>
+            <a:r>
+              <a:rPr lang="en-US" altLang="zh-CN" sz="1400"/>
+              <a:t>electron_mirror=https://npmmirror.com/mirrors/electron/</a:t>
+            </a:r>
+            <a:endParaRPr lang="en-US" altLang="zh-CN" sz="1400"/>
+          </a:p>
+          <a:p>
+            <a:pPr lvl="1"/>
+            <a:r>
+              <a:rPr lang="en-US" altLang="zh-CN" sz="1400"/>
+              <a:t>electron_custom_dir={{ version }}</a:t>
+            </a:r>
+            <a:endParaRPr lang="en-US" altLang="zh-CN" sz="1400"/>
           </a:p>
         </p:txBody>
       </p:sp>
